--- a/projectS.pptx
+++ b/projectS.pptx
@@ -7,7 +7,8 @@
   <p:sldIdLst>
     <p:sldId id="256" r:id="rId2"/>
     <p:sldId id="257" r:id="rId3"/>
-    <p:sldId id="258" r:id="rId4"/>
+    <p:sldId id="259" r:id="rId4"/>
+    <p:sldId id="258" r:id="rId5"/>
   </p:sldIdLst>
   <p:sldSz cx="12192000" cy="6858000"/>
   <p:notesSz cx="6858000" cy="9144000"/>
@@ -117,7 +118,7 @@
 <file path=ppt/revisionInfo.xml><?xml version="1.0" encoding="utf-8"?>
 <p1510:revInfo xmlns:a="http://schemas.openxmlformats.org/drawingml/2006/main" xmlns:r="http://schemas.openxmlformats.org/officeDocument/2006/relationships" xmlns:p1510="http://schemas.microsoft.com/office/powerpoint/2015/10/main">
   <p1510:revLst>
-    <p1510:client id="{C5D0EDD0-C54E-4EC8-8A36-5152F49A94A2}" v="147" dt="2026-04-28T11:06:14.111"/>
+    <p1510:client id="{1D6F559E-0A14-48D2-A812-A3AA013044DB}" v="53" dt="2026-05-05T07:46:45.189"/>
   </p1510:revLst>
 </p1510:revInfo>
 </file>
@@ -251,7 +252,7 @@
           <a:p>
             <a:fld id="{F2FFB779-270B-4192-84BA-A697F48306DC}" type="datetimeFigureOut">
               <a:rPr lang="ru-RU" smtClean="0"/>
-              <a:t>28.04.2026</a:t>
+              <a:t>05.05.2026</a:t>
             </a:fld>
             <a:endParaRPr lang="ru-RU"/>
           </a:p>
@@ -419,7 +420,7 @@
           <a:p>
             <a:fld id="{F2FFB779-270B-4192-84BA-A697F48306DC}" type="datetimeFigureOut">
               <a:rPr lang="ru-RU" smtClean="0"/>
-              <a:t>28.04.2026</a:t>
+              <a:t>05.05.2026</a:t>
             </a:fld>
             <a:endParaRPr lang="ru-RU"/>
           </a:p>
@@ -597,7 +598,7 @@
           <a:p>
             <a:fld id="{F2FFB779-270B-4192-84BA-A697F48306DC}" type="datetimeFigureOut">
               <a:rPr lang="ru-RU" smtClean="0"/>
-              <a:t>28.04.2026</a:t>
+              <a:t>05.05.2026</a:t>
             </a:fld>
             <a:endParaRPr lang="ru-RU"/>
           </a:p>
@@ -765,7 +766,7 @@
           <a:p>
             <a:fld id="{F2FFB779-270B-4192-84BA-A697F48306DC}" type="datetimeFigureOut">
               <a:rPr lang="ru-RU" smtClean="0"/>
-              <a:t>28.04.2026</a:t>
+              <a:t>05.05.2026</a:t>
             </a:fld>
             <a:endParaRPr lang="ru-RU"/>
           </a:p>
@@ -1010,7 +1011,7 @@
           <a:p>
             <a:fld id="{F2FFB779-270B-4192-84BA-A697F48306DC}" type="datetimeFigureOut">
               <a:rPr lang="ru-RU" smtClean="0"/>
-              <a:t>28.04.2026</a:t>
+              <a:t>05.05.2026</a:t>
             </a:fld>
             <a:endParaRPr lang="ru-RU"/>
           </a:p>
@@ -1239,7 +1240,7 @@
           <a:p>
             <a:fld id="{F2FFB779-270B-4192-84BA-A697F48306DC}" type="datetimeFigureOut">
               <a:rPr lang="ru-RU" smtClean="0"/>
-              <a:t>28.04.2026</a:t>
+              <a:t>05.05.2026</a:t>
             </a:fld>
             <a:endParaRPr lang="ru-RU"/>
           </a:p>
@@ -1603,7 +1604,7 @@
           <a:p>
             <a:fld id="{F2FFB779-270B-4192-84BA-A697F48306DC}" type="datetimeFigureOut">
               <a:rPr lang="ru-RU" smtClean="0"/>
-              <a:t>28.04.2026</a:t>
+              <a:t>05.05.2026</a:t>
             </a:fld>
             <a:endParaRPr lang="ru-RU"/>
           </a:p>
@@ -1720,7 +1721,7 @@
           <a:p>
             <a:fld id="{F2FFB779-270B-4192-84BA-A697F48306DC}" type="datetimeFigureOut">
               <a:rPr lang="ru-RU" smtClean="0"/>
-              <a:t>28.04.2026</a:t>
+              <a:t>05.05.2026</a:t>
             </a:fld>
             <a:endParaRPr lang="ru-RU"/>
           </a:p>
@@ -1815,7 +1816,7 @@
           <a:p>
             <a:fld id="{F2FFB779-270B-4192-84BA-A697F48306DC}" type="datetimeFigureOut">
               <a:rPr lang="ru-RU" smtClean="0"/>
-              <a:t>28.04.2026</a:t>
+              <a:t>05.05.2026</a:t>
             </a:fld>
             <a:endParaRPr lang="ru-RU"/>
           </a:p>
@@ -2090,7 +2091,7 @@
           <a:p>
             <a:fld id="{F2FFB779-270B-4192-84BA-A697F48306DC}" type="datetimeFigureOut">
               <a:rPr lang="ru-RU" smtClean="0"/>
-              <a:t>28.04.2026</a:t>
+              <a:t>05.05.2026</a:t>
             </a:fld>
             <a:endParaRPr lang="ru-RU"/>
           </a:p>
@@ -2342,7 +2343,7 @@
           <a:p>
             <a:fld id="{F2FFB779-270B-4192-84BA-A697F48306DC}" type="datetimeFigureOut">
               <a:rPr lang="ru-RU" smtClean="0"/>
-              <a:t>28.04.2026</a:t>
+              <a:t>05.05.2026</a:t>
             </a:fld>
             <a:endParaRPr lang="ru-RU"/>
           </a:p>
@@ -2553,7 +2554,7 @@
           <a:p>
             <a:fld id="{F2FFB779-270B-4192-84BA-A697F48306DC}" type="datetimeFigureOut">
               <a:rPr lang="ru-RU" smtClean="0"/>
-              <a:t>28.04.2026</a:t>
+              <a:t>05.05.2026</a:t>
             </a:fld>
             <a:endParaRPr lang="ru-RU"/>
           </a:p>
@@ -2970,7 +2971,7 @@
         </p:nvSpPr>
         <p:spPr>
           <a:xfrm>
-            <a:off x="1524000" y="-677059"/>
+            <a:off x="1524000" y="4731"/>
             <a:ext cx="9144000" cy="2387600"/>
           </a:xfrm>
         </p:spPr>
@@ -2981,9 +2982,14 @@
           <a:lstStyle/>
           <a:p>
             <a:r>
+              <a:rPr lang="ru-RU" sz="4800" dirty="0"/>
+              <a:t>Телеграм бот для поиска текстов </a:t>
+            </a:r>
+            <a:r>
               <a:rPr lang="ru-RU" sz="4800"/>
-              <a:t>Бот для поиска текстов песен</a:t>
-            </a:r>
+              <a:t>песен на Genius API</a:t>
+            </a:r>
+            <a:endParaRPr lang="ru-RU" sz="4800" dirty="0"/>
           </a:p>
         </p:txBody>
       </p:sp>
@@ -2997,7 +3003,12 @@
             <p:ph type="subTitle" idx="1"/>
           </p:nvPr>
         </p:nvSpPr>
-        <p:spPr/>
+        <p:spPr>
+          <a:xfrm>
+            <a:off x="1524000" y="3431591"/>
+            <a:ext cx="9144000" cy="1655762"/>
+          </a:xfrm>
+        </p:spPr>
         <p:txBody>
           <a:bodyPr/>
           <a:lstStyle/>
@@ -3052,7 +3063,12 @@
             <p:ph type="title"/>
           </p:nvPr>
         </p:nvSpPr>
-        <p:spPr/>
+        <p:spPr>
+          <a:xfrm>
+            <a:off x="2642937" y="355099"/>
+            <a:ext cx="7146758" cy="1355641"/>
+          </a:xfrm>
+        </p:spPr>
         <p:txBody>
           <a:bodyPr/>
           <a:lstStyle/>
@@ -3138,6 +3154,103 @@
           <p:cNvPr id="2" name="Заголовок 1">
             <a:extLst>
               <a:ext uri="{FF2B5EF4-FFF2-40B4-BE49-F238E27FC236}">
+                <a16:creationId xmlns:a16="http://schemas.microsoft.com/office/drawing/2014/main" id="{73C07859-58FE-5553-F354-D9B65ED167B8}"/>
+              </a:ext>
+            </a:extLst>
+          </p:cNvPr>
+          <p:cNvSpPr>
+            <a:spLocks noGrp="1"/>
+          </p:cNvSpPr>
+          <p:nvPr>
+            <p:ph type="title"/>
+          </p:nvPr>
+        </p:nvSpPr>
+        <p:spPr>
+          <a:xfrm>
+            <a:off x="122345" y="734528"/>
+            <a:ext cx="2922539" cy="982132"/>
+          </a:xfrm>
+        </p:spPr>
+        <p:txBody>
+          <a:bodyPr>
+            <a:normAutofit/>
+          </a:bodyPr>
+          <a:lstStyle/>
+          <a:p>
+            <a:r>
+              <a:rPr lang="ru-RU" sz="4000"/>
+              <a:t>ЗАЛЕТАЕМ!!!</a:t>
+            </a:r>
+          </a:p>
+        </p:txBody>
+      </p:sp>
+      <p:pic>
+        <p:nvPicPr>
+          <p:cNvPr id="4" name="Объект 3" descr="Изображение выглядит как текст, Графика, графический дизайн, графическая вставка&#10;&#10;Содержимое, созданное искусственным интеллектом, может быть неверным.">
+            <a:extLst>
+              <a:ext uri="{FF2B5EF4-FFF2-40B4-BE49-F238E27FC236}">
+                <a16:creationId xmlns:a16="http://schemas.microsoft.com/office/drawing/2014/main" id="{7977BC9B-AA0D-B073-34C4-FA4871C434A1}"/>
+              </a:ext>
+            </a:extLst>
+          </p:cNvPr>
+          <p:cNvPicPr>
+            <a:picLocks noGrp="1" noChangeAspect="1"/>
+          </p:cNvPicPr>
+          <p:nvPr>
+            <p:ph idx="1"/>
+          </p:nvPr>
+        </p:nvPicPr>
+        <p:blipFill>
+          <a:blip r:embed="rId2"/>
+          <a:stretch>
+            <a:fillRect/>
+          </a:stretch>
+        </p:blipFill>
+        <p:spPr>
+          <a:xfrm>
+            <a:off x="3381008" y="-1339"/>
+            <a:ext cx="5255549" cy="6977024"/>
+          </a:xfrm>
+          <a:prstGeom prst="rect">
+            <a:avLst/>
+          </a:prstGeom>
+        </p:spPr>
+      </p:pic>
+    </p:spTree>
+    <p:extLst>
+      <p:ext uri="{BB962C8B-B14F-4D97-AF65-F5344CB8AC3E}">
+        <p14:creationId xmlns:p14="http://schemas.microsoft.com/office/powerpoint/2010/main" val="992690004"/>
+      </p:ext>
+    </p:extLst>
+  </p:cSld>
+  <p:clrMapOvr>
+    <a:masterClrMapping/>
+  </p:clrMapOvr>
+</p:sld>
+</file>
+
+<file path=ppt/slides/slide4.xml><?xml version="1.0" encoding="utf-8"?>
+<p:sld xmlns:a="http://schemas.openxmlformats.org/drawingml/2006/main" xmlns:r="http://schemas.openxmlformats.org/officeDocument/2006/relationships" xmlns:p="http://schemas.openxmlformats.org/presentationml/2006/main">
+  <p:cSld>
+    <p:spTree>
+      <p:nvGrpSpPr>
+        <p:cNvPr id="1" name=""/>
+        <p:cNvGrpSpPr/>
+        <p:nvPr/>
+      </p:nvGrpSpPr>
+      <p:grpSpPr>
+        <a:xfrm>
+          <a:off x="0" y="0"/>
+          <a:ext cx="0" cy="0"/>
+          <a:chOff x="0" y="0"/>
+          <a:chExt cx="0" cy="0"/>
+        </a:xfrm>
+      </p:grpSpPr>
+      <p:sp>
+        <p:nvSpPr>
+          <p:cNvPr id="2" name="Заголовок 1">
+            <a:extLst>
+              <a:ext uri="{FF2B5EF4-FFF2-40B4-BE49-F238E27FC236}">
                 <a16:creationId xmlns:a16="http://schemas.microsoft.com/office/drawing/2014/main" id="{07FF8811-AE58-6AE4-09B1-92FB785540C2}"/>
               </a:ext>
             </a:extLst>
@@ -3189,7 +3302,7 @@
             </a:pPr>
             <a:r>
               <a:rPr lang="ru-RU"/>
-              <a:t>Не, ну а че вы хотели? Тут показывать надо, а не говорить!</a:t>
+              <a:t>Не, ну а че вы хотели? Тут показывать надо, а не говорить..</a:t>
             </a:r>
           </a:p>
         </p:txBody>
